--- a/week2/Week2 intro.pptx
+++ b/week2/Week2 intro.pptx
@@ -5,7 +5,7 @@
     <p:sldMasterId id="2147483648" r:id="rId1"/>
   </p:sldMasterIdLst>
   <p:notesMasterIdLst>
-    <p:notesMasterId r:id="rId20"/>
+    <p:notesMasterId r:id="rId21"/>
   </p:notesMasterIdLst>
   <p:sldIdLst>
     <p:sldId id="256" r:id="rId2"/>
@@ -20,12 +20,13 @@
     <p:sldId id="264" r:id="rId11"/>
     <p:sldId id="261" r:id="rId12"/>
     <p:sldId id="265" r:id="rId13"/>
-    <p:sldId id="270" r:id="rId14"/>
-    <p:sldId id="299" r:id="rId15"/>
-    <p:sldId id="301" r:id="rId16"/>
-    <p:sldId id="310" r:id="rId17"/>
-    <p:sldId id="355" r:id="rId18"/>
-    <p:sldId id="473" r:id="rId19"/>
+    <p:sldId id="474" r:id="rId14"/>
+    <p:sldId id="270" r:id="rId15"/>
+    <p:sldId id="299" r:id="rId16"/>
+    <p:sldId id="301" r:id="rId17"/>
+    <p:sldId id="310" r:id="rId18"/>
+    <p:sldId id="355" r:id="rId19"/>
+    <p:sldId id="473" r:id="rId20"/>
   </p:sldIdLst>
   <p:sldSz cx="12192000" cy="6858000"/>
   <p:notesSz cx="6858000" cy="9144000"/>
@@ -714,7 +715,7 @@
           <a:p>
             <a:fld id="{C5E54B5D-4EF2-3F43-A3BD-845D3A182EA3}" type="slidenum">
               <a:rPr lang="en-GB" smtClean="0"/>
-              <a:t>17</a:t>
+              <a:t>18</a:t>
             </a:fld>
             <a:endParaRPr lang="en-GB"/>
           </a:p>
@@ -5312,6 +5313,53 @@
           </a:p>
         </p:txBody>
       </p:sp>
+      <p:pic>
+        <p:nvPicPr>
+          <p:cNvPr id="1026" name="Picture 2" descr="QR Code Image">
+            <a:extLst>
+              <a:ext uri="{FF2B5EF4-FFF2-40B4-BE49-F238E27FC236}">
+                <a16:creationId xmlns:a16="http://schemas.microsoft.com/office/drawing/2014/main" id="{F063F3A5-D2CA-4666-A314-2C2CA674FCFE}"/>
+              </a:ext>
+            </a:extLst>
+          </p:cNvPr>
+          <p:cNvPicPr>
+            <a:picLocks noChangeAspect="1" noChangeArrowheads="1"/>
+          </p:cNvPicPr>
+          <p:nvPr/>
+        </p:nvPicPr>
+        <p:blipFill>
+          <a:blip r:embed="rId3">
+            <a:extLst>
+              <a:ext uri="{28A0092B-C50C-407E-A947-70E740481C1C}">
+                <a14:useLocalDpi xmlns:a14="http://schemas.microsoft.com/office/drawing/2010/main" val="0"/>
+              </a:ext>
+            </a:extLst>
+          </a:blip>
+          <a:srcRect/>
+          <a:stretch>
+            <a:fillRect/>
+          </a:stretch>
+        </p:blipFill>
+        <p:spPr bwMode="auto">
+          <a:xfrm>
+            <a:off x="367728" y="641936"/>
+            <a:ext cx="2334172" cy="2334172"/>
+          </a:xfrm>
+          <a:prstGeom prst="rect">
+            <a:avLst/>
+          </a:prstGeom>
+          <a:noFill/>
+          <a:extLst>
+            <a:ext uri="{909E8E84-426E-40DD-AFC4-6F175D3DCCD1}">
+              <a14:hiddenFill xmlns:a14="http://schemas.microsoft.com/office/drawing/2010/main">
+                <a:solidFill>
+                  <a:srgbClr val="FFFFFF"/>
+                </a:solidFill>
+              </a14:hiddenFill>
+            </a:ext>
+          </a:extLst>
+        </p:spPr>
+      </p:pic>
     </p:spTree>
     <p:extLst>
       <p:ext uri="{BB962C8B-B14F-4D97-AF65-F5344CB8AC3E}">
@@ -5326,6 +5374,175 @@
 </file>
 
 <file path=ppt/slides/slide13.xml><?xml version="1.0" encoding="utf-8"?>
+<p:sld xmlns:a="http://schemas.openxmlformats.org/drawingml/2006/main" xmlns:r="http://schemas.openxmlformats.org/officeDocument/2006/relationships" xmlns:p="http://schemas.openxmlformats.org/presentationml/2006/main">
+  <p:cSld>
+    <p:spTree>
+      <p:nvGrpSpPr>
+        <p:cNvPr id="1" name=""/>
+        <p:cNvGrpSpPr/>
+        <p:nvPr/>
+      </p:nvGrpSpPr>
+      <p:grpSpPr>
+        <a:xfrm>
+          <a:off x="0" y="0"/>
+          <a:ext cx="0" cy="0"/>
+          <a:chOff x="0" y="0"/>
+          <a:chExt cx="0" cy="0"/>
+        </a:xfrm>
+      </p:grpSpPr>
+      <p:pic>
+        <p:nvPicPr>
+          <p:cNvPr id="4" name="Picture 2" descr="QR Code Image">
+            <a:extLst>
+              <a:ext uri="{FF2B5EF4-FFF2-40B4-BE49-F238E27FC236}">
+                <a16:creationId xmlns:a16="http://schemas.microsoft.com/office/drawing/2014/main" id="{7D705460-1AED-EAB9-7176-8BAE54B60543}"/>
+              </a:ext>
+            </a:extLst>
+          </p:cNvPr>
+          <p:cNvPicPr>
+            <a:picLocks noChangeAspect="1" noChangeArrowheads="1"/>
+          </p:cNvPicPr>
+          <p:nvPr/>
+        </p:nvPicPr>
+        <p:blipFill>
+          <a:blip r:embed="rId2">
+            <a:extLst>
+              <a:ext uri="{28A0092B-C50C-407E-A947-70E740481C1C}">
+                <a14:useLocalDpi xmlns:a14="http://schemas.microsoft.com/office/drawing/2010/main" val="0"/>
+              </a:ext>
+            </a:extLst>
+          </a:blip>
+          <a:srcRect/>
+          <a:stretch>
+            <a:fillRect/>
+          </a:stretch>
+        </p:blipFill>
+        <p:spPr bwMode="auto">
+          <a:xfrm>
+            <a:off x="4036613" y="1982486"/>
+            <a:ext cx="4118769" cy="4118769"/>
+          </a:xfrm>
+          <a:prstGeom prst="rect">
+            <a:avLst/>
+          </a:prstGeom>
+          <a:noFill/>
+          <a:extLst>
+            <a:ext uri="{909E8E84-426E-40DD-AFC4-6F175D3DCCD1}">
+              <a14:hiddenFill xmlns:a14="http://schemas.microsoft.com/office/drawing/2010/main">
+                <a:solidFill>
+                  <a:srgbClr val="FFFFFF"/>
+                </a:solidFill>
+              </a14:hiddenFill>
+            </a:ext>
+          </a:extLst>
+        </p:spPr>
+      </p:pic>
+      <p:sp>
+        <p:nvSpPr>
+          <p:cNvPr id="5" name="TextBox 4">
+            <a:extLst>
+              <a:ext uri="{FF2B5EF4-FFF2-40B4-BE49-F238E27FC236}">
+                <a16:creationId xmlns:a16="http://schemas.microsoft.com/office/drawing/2014/main" id="{8C3AA58E-722A-18DC-AB15-947750F5F1EC}"/>
+              </a:ext>
+            </a:extLst>
+          </p:cNvPr>
+          <p:cNvSpPr txBox="1"/>
+          <p:nvPr/>
+        </p:nvSpPr>
+        <p:spPr>
+          <a:xfrm>
+            <a:off x="713980" y="854266"/>
+            <a:ext cx="10764037" cy="830997"/>
+          </a:xfrm>
+          <a:prstGeom prst="rect">
+            <a:avLst/>
+          </a:prstGeom>
+          <a:noFill/>
+        </p:spPr>
+        <p:txBody>
+          <a:bodyPr wrap="none" rtlCol="0">
+            <a:spAutoFit/>
+          </a:bodyPr>
+          <a:lstStyle/>
+          <a:p>
+            <a:pPr algn="ctr"/>
+            <a:r>
+              <a:rPr lang="en-GB" sz="2400" dirty="0"/>
+              <a:t>To begin, open your terminal and type (or scan QR code and copy): </a:t>
+            </a:r>
+          </a:p>
+          <a:p>
+            <a:pPr algn="ctr"/>
+            <a:r>
+              <a:rPr lang="en-GB" sz="2400" dirty="0">
+                <a:latin typeface="Aptos" panose="020B0004020202020204" pitchFamily="34" charset="0"/>
+                <a:ea typeface="Roboto" panose="02000000000000000000" pitchFamily="2" charset="0"/>
+                <a:cs typeface="Roboto" panose="02000000000000000000" pitchFamily="2" charset="0"/>
+              </a:rPr>
+              <a:t>git clone https://</a:t>
+            </a:r>
+            <a:r>
+              <a:rPr lang="en-GB" sz="2400" dirty="0" err="1">
+                <a:latin typeface="Aptos" panose="020B0004020202020204" pitchFamily="34" charset="0"/>
+                <a:ea typeface="Roboto" panose="02000000000000000000" pitchFamily="2" charset="0"/>
+                <a:cs typeface="Roboto" panose="02000000000000000000" pitchFamily="2" charset="0"/>
+              </a:rPr>
+              <a:t>github.com</a:t>
+            </a:r>
+            <a:r>
+              <a:rPr lang="en-GB" sz="2400" dirty="0">
+                <a:latin typeface="Aptos" panose="020B0004020202020204" pitchFamily="34" charset="0"/>
+                <a:ea typeface="Roboto" panose="02000000000000000000" pitchFamily="2" charset="0"/>
+                <a:cs typeface="Roboto" panose="02000000000000000000" pitchFamily="2" charset="0"/>
+              </a:rPr>
+              <a:t>/</a:t>
+            </a:r>
+            <a:r>
+              <a:rPr lang="en-GB" sz="2400" dirty="0" err="1">
+                <a:latin typeface="Aptos" panose="020B0004020202020204" pitchFamily="34" charset="0"/>
+                <a:ea typeface="Roboto" panose="02000000000000000000" pitchFamily="2" charset="0"/>
+                <a:cs typeface="Roboto" panose="02000000000000000000" pitchFamily="2" charset="0"/>
+              </a:rPr>
+              <a:t>ironcevic</a:t>
+            </a:r>
+            <a:r>
+              <a:rPr lang="en-GB" sz="2400" dirty="0">
+                <a:latin typeface="Aptos" panose="020B0004020202020204" pitchFamily="34" charset="0"/>
+                <a:ea typeface="Roboto" panose="02000000000000000000" pitchFamily="2" charset="0"/>
+                <a:cs typeface="Roboto" panose="02000000000000000000" pitchFamily="2" charset="0"/>
+              </a:rPr>
+              <a:t>/</a:t>
+            </a:r>
+            <a:r>
+              <a:rPr lang="en-GB" sz="2400" dirty="0" err="1">
+                <a:latin typeface="Aptos" panose="020B0004020202020204" pitchFamily="34" charset="0"/>
+                <a:ea typeface="Roboto" panose="02000000000000000000" pitchFamily="2" charset="0"/>
+                <a:cs typeface="Roboto" panose="02000000000000000000" pitchFamily="2" charset="0"/>
+              </a:rPr>
+              <a:t>Modelling_low_dimensional_materials.git</a:t>
+            </a:r>
+            <a:endParaRPr lang="en-GB" sz="2400" dirty="0">
+              <a:latin typeface="Aptos" panose="020B0004020202020204" pitchFamily="34" charset="0"/>
+              <a:ea typeface="Roboto" panose="02000000000000000000" pitchFamily="2" charset="0"/>
+              <a:cs typeface="Roboto" panose="02000000000000000000" pitchFamily="2" charset="0"/>
+            </a:endParaRPr>
+          </a:p>
+        </p:txBody>
+      </p:sp>
+    </p:spTree>
+    <p:extLst>
+      <p:ext uri="{BB962C8B-B14F-4D97-AF65-F5344CB8AC3E}">
+        <p14:creationId xmlns:p14="http://schemas.microsoft.com/office/powerpoint/2010/main" val="2951870891"/>
+      </p:ext>
+    </p:extLst>
+  </p:cSld>
+  <p:clrMapOvr>
+    <a:masterClrMapping/>
+  </p:clrMapOvr>
+</p:sld>
+</file>
+
+<file path=ppt/slides/slide14.xml><?xml version="1.0" encoding="utf-8"?>
 <p:sld xmlns:a="http://schemas.openxmlformats.org/drawingml/2006/main" xmlns:r="http://schemas.openxmlformats.org/officeDocument/2006/relationships" xmlns:p="http://schemas.openxmlformats.org/presentationml/2006/main">
   <p:cSld>
     <p:spTree>
@@ -5983,572 +6200,6 @@
 </p:sld>
 </file>
 
-<file path=ppt/slides/slide14.xml><?xml version="1.0" encoding="utf-8"?>
-<p:sld xmlns:a="http://schemas.openxmlformats.org/drawingml/2006/main" xmlns:r="http://schemas.openxmlformats.org/officeDocument/2006/relationships" xmlns:p="http://schemas.openxmlformats.org/presentationml/2006/main">
-  <p:cSld>
-    <p:spTree>
-      <p:nvGrpSpPr>
-        <p:cNvPr id="1" name=""/>
-        <p:cNvGrpSpPr/>
-        <p:nvPr/>
-      </p:nvGrpSpPr>
-      <p:grpSpPr>
-        <a:xfrm>
-          <a:off x="0" y="0"/>
-          <a:ext cx="0" cy="0"/>
-          <a:chOff x="0" y="0"/>
-          <a:chExt cx="0" cy="0"/>
-        </a:xfrm>
-      </p:grpSpPr>
-      <p:sp>
-        <p:nvSpPr>
-          <p:cNvPr id="30" name="Title 1">
-            <a:extLst>
-              <a:ext uri="{FF2B5EF4-FFF2-40B4-BE49-F238E27FC236}">
-                <a16:creationId xmlns:a16="http://schemas.microsoft.com/office/drawing/2014/main" id="{3C5D19B2-C404-F9F2-DEE2-88E588E8EE15}"/>
-              </a:ext>
-            </a:extLst>
-          </p:cNvPr>
-          <p:cNvSpPr>
-            <a:spLocks noGrp="1"/>
-          </p:cNvSpPr>
-          <p:nvPr>
-            <p:ph type="title"/>
-          </p:nvPr>
-        </p:nvSpPr>
-        <p:spPr>
-          <a:xfrm>
-            <a:off x="-1" y="1"/>
-            <a:ext cx="12192001" cy="764230"/>
-          </a:xfrm>
-        </p:spPr>
-        <p:txBody>
-          <a:bodyPr>
-            <a:normAutofit/>
-          </a:bodyPr>
-          <a:lstStyle/>
-          <a:p>
-            <a:pPr algn="ctr"/>
-            <a:r>
-              <a:rPr lang="en-GB" sz="2800" dirty="0">
-                <a:latin typeface="Aptos" panose="020B0004020202020204" pitchFamily="34" charset="0"/>
-              </a:rPr>
-              <a:t>Theory: Zn porphene is a metallic conductor</a:t>
-            </a:r>
-            <a:endParaRPr lang="en-GB" sz="2800" b="1" dirty="0">
-              <a:latin typeface="Aptos" panose="020B0004020202020204" pitchFamily="34" charset="0"/>
-            </a:endParaRPr>
-          </a:p>
-        </p:txBody>
-      </p:sp>
-      <p:sp>
-        <p:nvSpPr>
-          <p:cNvPr id="3" name="TextBox 2">
-            <a:extLst>
-              <a:ext uri="{FF2B5EF4-FFF2-40B4-BE49-F238E27FC236}">
-                <a16:creationId xmlns:a16="http://schemas.microsoft.com/office/drawing/2014/main" id="{2518C291-F242-72F5-9E34-9ED13BF34F66}"/>
-              </a:ext>
-            </a:extLst>
-          </p:cNvPr>
-          <p:cNvSpPr txBox="1"/>
-          <p:nvPr/>
-        </p:nvSpPr>
-        <p:spPr>
-          <a:xfrm>
-            <a:off x="7140115" y="1987717"/>
-            <a:ext cx="5051886" cy="1887696"/>
-          </a:xfrm>
-          <a:prstGeom prst="rect">
-            <a:avLst/>
-          </a:prstGeom>
-          <a:noFill/>
-        </p:spPr>
-        <p:txBody>
-          <a:bodyPr wrap="square">
-            <a:spAutoFit/>
-          </a:bodyPr>
-          <a:lstStyle/>
-          <a:p>
-            <a:pPr>
-              <a:spcAft>
-                <a:spcPts val="800"/>
-              </a:spcAft>
-            </a:pPr>
-            <a:r>
-              <a:rPr lang="en-US" i="1" kern="950" dirty="0">
-                <a:effectLst/>
-                <a:latin typeface="Aptos" panose="020B0004020202020204" pitchFamily="34" charset="0"/>
-                <a:ea typeface="Times New Roman" panose="02020603050405020304" pitchFamily="18" charset="0"/>
-                <a:cs typeface="Times New Roman" panose="02020603050405020304" pitchFamily="18" charset="0"/>
-              </a:rPr>
-              <a:t>Int. J. Quantum Chem. </a:t>
-            </a:r>
-            <a:r>
-              <a:rPr lang="en-US" b="1" kern="950" dirty="0">
-                <a:effectLst/>
-                <a:latin typeface="Aptos" panose="020B0004020202020204" pitchFamily="34" charset="0"/>
-                <a:ea typeface="Times New Roman" panose="02020603050405020304" pitchFamily="18" charset="0"/>
-                <a:cs typeface="Times New Roman" panose="02020603050405020304" pitchFamily="18" charset="0"/>
-              </a:rPr>
-              <a:t>2009</a:t>
-            </a:r>
-            <a:r>
-              <a:rPr lang="en-US" kern="950" dirty="0">
-                <a:effectLst/>
-                <a:latin typeface="Aptos" panose="020B0004020202020204" pitchFamily="34" charset="0"/>
-                <a:ea typeface="Times New Roman" panose="02020603050405020304" pitchFamily="18" charset="0"/>
-                <a:cs typeface="Times New Roman" panose="02020603050405020304" pitchFamily="18" charset="0"/>
-              </a:rPr>
-              <a:t>, </a:t>
-            </a:r>
-            <a:r>
-              <a:rPr lang="en-US" i="1" kern="950" dirty="0">
-                <a:effectLst/>
-                <a:latin typeface="Aptos" panose="020B0004020202020204" pitchFamily="34" charset="0"/>
-                <a:ea typeface="Times New Roman" panose="02020603050405020304" pitchFamily="18" charset="0"/>
-                <a:cs typeface="Times New Roman" panose="02020603050405020304" pitchFamily="18" charset="0"/>
-              </a:rPr>
-              <a:t>109</a:t>
-            </a:r>
-            <a:r>
-              <a:rPr lang="en-US" kern="950" dirty="0">
-                <a:effectLst/>
-                <a:latin typeface="Aptos" panose="020B0004020202020204" pitchFamily="34" charset="0"/>
-                <a:ea typeface="Times New Roman" panose="02020603050405020304" pitchFamily="18" charset="0"/>
-                <a:cs typeface="Times New Roman" panose="02020603050405020304" pitchFamily="18" charset="0"/>
-              </a:rPr>
-              <a:t>, 1584-1597. </a:t>
-            </a:r>
-            <a:endParaRPr lang="en-GB" kern="950" dirty="0">
-              <a:effectLst/>
-              <a:latin typeface="Aptos" panose="020B0004020202020204" pitchFamily="34" charset="0"/>
-              <a:ea typeface="Times New Roman" panose="02020603050405020304" pitchFamily="18" charset="0"/>
-              <a:cs typeface="Times New Roman" panose="02020603050405020304" pitchFamily="18" charset="0"/>
-            </a:endParaRPr>
-          </a:p>
-          <a:p>
-            <a:pPr>
-              <a:spcAft>
-                <a:spcPts val="800"/>
-              </a:spcAft>
-            </a:pPr>
-            <a:r>
-              <a:rPr lang="en-US" i="1" kern="950" dirty="0">
-                <a:effectLst/>
-                <a:latin typeface="Aptos" panose="020B0004020202020204" pitchFamily="34" charset="0"/>
-                <a:ea typeface="Times New Roman" panose="02020603050405020304" pitchFamily="18" charset="0"/>
-                <a:cs typeface="Times New Roman" panose="02020603050405020304" pitchFamily="18" charset="0"/>
-              </a:rPr>
-              <a:t>Int. J. Quantum Chem. </a:t>
-            </a:r>
-            <a:r>
-              <a:rPr lang="en-US" b="1" kern="950" dirty="0">
-                <a:effectLst/>
-                <a:latin typeface="Aptos" panose="020B0004020202020204" pitchFamily="34" charset="0"/>
-                <a:ea typeface="Times New Roman" panose="02020603050405020304" pitchFamily="18" charset="0"/>
-                <a:cs typeface="Times New Roman" panose="02020603050405020304" pitchFamily="18" charset="0"/>
-              </a:rPr>
-              <a:t>2011</a:t>
-            </a:r>
-            <a:r>
-              <a:rPr lang="en-US" kern="950" dirty="0">
-                <a:effectLst/>
-                <a:latin typeface="Aptos" panose="020B0004020202020204" pitchFamily="34" charset="0"/>
-                <a:ea typeface="Times New Roman" panose="02020603050405020304" pitchFamily="18" charset="0"/>
-                <a:cs typeface="Times New Roman" panose="02020603050405020304" pitchFamily="18" charset="0"/>
-              </a:rPr>
-              <a:t>, </a:t>
-            </a:r>
-            <a:r>
-              <a:rPr lang="en-US" i="1" kern="950" dirty="0">
-                <a:effectLst/>
-                <a:latin typeface="Aptos" panose="020B0004020202020204" pitchFamily="34" charset="0"/>
-                <a:ea typeface="Times New Roman" panose="02020603050405020304" pitchFamily="18" charset="0"/>
-                <a:cs typeface="Times New Roman" panose="02020603050405020304" pitchFamily="18" charset="0"/>
-              </a:rPr>
-              <a:t>111</a:t>
-            </a:r>
-            <a:r>
-              <a:rPr lang="en-US" kern="950" dirty="0">
-                <a:effectLst/>
-                <a:latin typeface="Aptos" panose="020B0004020202020204" pitchFamily="34" charset="0"/>
-                <a:ea typeface="Times New Roman" panose="02020603050405020304" pitchFamily="18" charset="0"/>
-                <a:cs typeface="Times New Roman" panose="02020603050405020304" pitchFamily="18" charset="0"/>
-              </a:rPr>
-              <a:t>, 3230-3238. </a:t>
-            </a:r>
-            <a:endParaRPr lang="en-GB" kern="950" dirty="0">
-              <a:effectLst/>
-              <a:latin typeface="Aptos" panose="020B0004020202020204" pitchFamily="34" charset="0"/>
-              <a:ea typeface="Times New Roman" panose="02020603050405020304" pitchFamily="18" charset="0"/>
-              <a:cs typeface="Times New Roman" panose="02020603050405020304" pitchFamily="18" charset="0"/>
-            </a:endParaRPr>
-          </a:p>
-          <a:p>
-            <a:pPr>
-              <a:spcAft>
-                <a:spcPts val="800"/>
-              </a:spcAft>
-            </a:pPr>
-            <a:r>
-              <a:rPr lang="en-US" i="1" kern="950" dirty="0">
-                <a:effectLst/>
-                <a:latin typeface="Aptos" panose="020B0004020202020204" pitchFamily="34" charset="0"/>
-                <a:ea typeface="Times New Roman" panose="02020603050405020304" pitchFamily="18" charset="0"/>
-                <a:cs typeface="Times New Roman" panose="02020603050405020304" pitchFamily="18" charset="0"/>
-              </a:rPr>
-              <a:t>RSC Adv. </a:t>
-            </a:r>
-            <a:r>
-              <a:rPr lang="en-US" b="1" kern="950" dirty="0">
-                <a:effectLst/>
-                <a:latin typeface="Aptos" panose="020B0004020202020204" pitchFamily="34" charset="0"/>
-                <a:ea typeface="Times New Roman" panose="02020603050405020304" pitchFamily="18" charset="0"/>
-                <a:cs typeface="Times New Roman" panose="02020603050405020304" pitchFamily="18" charset="0"/>
-              </a:rPr>
-              <a:t>2013</a:t>
-            </a:r>
-            <a:r>
-              <a:rPr lang="en-US" kern="950" dirty="0">
-                <a:effectLst/>
-                <a:latin typeface="Aptos" panose="020B0004020202020204" pitchFamily="34" charset="0"/>
-                <a:ea typeface="Times New Roman" panose="02020603050405020304" pitchFamily="18" charset="0"/>
-                <a:cs typeface="Times New Roman" panose="02020603050405020304" pitchFamily="18" charset="0"/>
-              </a:rPr>
-              <a:t>, </a:t>
-            </a:r>
-            <a:r>
-              <a:rPr lang="en-US" i="1" kern="950" dirty="0">
-                <a:effectLst/>
-                <a:latin typeface="Aptos" panose="020B0004020202020204" pitchFamily="34" charset="0"/>
-                <a:ea typeface="Times New Roman" panose="02020603050405020304" pitchFamily="18" charset="0"/>
-                <a:cs typeface="Times New Roman" panose="02020603050405020304" pitchFamily="18" charset="0"/>
-              </a:rPr>
-              <a:t>3</a:t>
-            </a:r>
-            <a:r>
-              <a:rPr lang="en-US" kern="950" dirty="0">
-                <a:effectLst/>
-                <a:latin typeface="Aptos" panose="020B0004020202020204" pitchFamily="34" charset="0"/>
-                <a:ea typeface="Times New Roman" panose="02020603050405020304" pitchFamily="18" charset="0"/>
-                <a:cs typeface="Times New Roman" panose="02020603050405020304" pitchFamily="18" charset="0"/>
-              </a:rPr>
-              <a:t>, 7016-7022</a:t>
-            </a:r>
-            <a:r>
-              <a:rPr lang="en-US" kern="950" dirty="0">
-                <a:latin typeface="Aptos" panose="020B0004020202020204" pitchFamily="34" charset="0"/>
-                <a:ea typeface="Times New Roman" panose="02020603050405020304" pitchFamily="18" charset="0"/>
-                <a:cs typeface="Times New Roman" panose="02020603050405020304" pitchFamily="18" charset="0"/>
-              </a:rPr>
-              <a:t>.</a:t>
-            </a:r>
-          </a:p>
-          <a:p>
-            <a:pPr>
-              <a:spcAft>
-                <a:spcPts val="800"/>
-              </a:spcAft>
-            </a:pPr>
-            <a:r>
-              <a:rPr lang="en-US" i="1" kern="950" dirty="0">
-                <a:effectLst/>
-                <a:latin typeface="Aptos" panose="020B0004020202020204" pitchFamily="34" charset="0"/>
-                <a:ea typeface="Times New Roman" panose="02020603050405020304" pitchFamily="18" charset="0"/>
-                <a:cs typeface="Times New Roman" panose="02020603050405020304" pitchFamily="18" charset="0"/>
-              </a:rPr>
-              <a:t>J. Phys. Chem. C </a:t>
-            </a:r>
-            <a:r>
-              <a:rPr lang="en-US" b="1" kern="950" dirty="0">
-                <a:effectLst/>
-                <a:latin typeface="Aptos" panose="020B0004020202020204" pitchFamily="34" charset="0"/>
-                <a:ea typeface="Times New Roman" panose="02020603050405020304" pitchFamily="18" charset="0"/>
-                <a:cs typeface="Times New Roman" panose="02020603050405020304" pitchFamily="18" charset="0"/>
-              </a:rPr>
-              <a:t>2018</a:t>
-            </a:r>
-            <a:r>
-              <a:rPr lang="en-US" kern="950" dirty="0">
-                <a:effectLst/>
-                <a:latin typeface="Aptos" panose="020B0004020202020204" pitchFamily="34" charset="0"/>
-                <a:ea typeface="Times New Roman" panose="02020603050405020304" pitchFamily="18" charset="0"/>
-                <a:cs typeface="Times New Roman" panose="02020603050405020304" pitchFamily="18" charset="0"/>
-              </a:rPr>
-              <a:t>, </a:t>
-            </a:r>
-            <a:r>
-              <a:rPr lang="en-US" i="1" kern="950" dirty="0">
-                <a:effectLst/>
-                <a:latin typeface="Aptos" panose="020B0004020202020204" pitchFamily="34" charset="0"/>
-                <a:ea typeface="Times New Roman" panose="02020603050405020304" pitchFamily="18" charset="0"/>
-                <a:cs typeface="Times New Roman" panose="02020603050405020304" pitchFamily="18" charset="0"/>
-              </a:rPr>
-              <a:t>122</a:t>
-            </a:r>
-            <a:r>
-              <a:rPr lang="en-US" kern="950" dirty="0">
-                <a:effectLst/>
-                <a:latin typeface="Aptos" panose="020B0004020202020204" pitchFamily="34" charset="0"/>
-                <a:ea typeface="Times New Roman" panose="02020603050405020304" pitchFamily="18" charset="0"/>
-                <a:cs typeface="Times New Roman" panose="02020603050405020304" pitchFamily="18" charset="0"/>
-              </a:rPr>
-              <a:t>, 23790-23798.</a:t>
-            </a:r>
-          </a:p>
-          <a:p>
-            <a:pPr>
-              <a:spcAft>
-                <a:spcPts val="800"/>
-              </a:spcAft>
-            </a:pPr>
-            <a:r>
-              <a:rPr lang="en-US" i="1" kern="950" dirty="0">
-                <a:effectLst/>
-                <a:latin typeface="Aptos" panose="020B0004020202020204" pitchFamily="34" charset="0"/>
-                <a:ea typeface="Times New Roman" panose="02020603050405020304" pitchFamily="18" charset="0"/>
-                <a:cs typeface="Times New Roman" panose="02020603050405020304" pitchFamily="18" charset="0"/>
-              </a:rPr>
-              <a:t>J. Mater. Chem. A </a:t>
-            </a:r>
-            <a:r>
-              <a:rPr lang="en-US" b="1" kern="950" dirty="0">
-                <a:effectLst/>
-                <a:latin typeface="Aptos" panose="020B0004020202020204" pitchFamily="34" charset="0"/>
-                <a:ea typeface="Times New Roman" panose="02020603050405020304" pitchFamily="18" charset="0"/>
-                <a:cs typeface="Times New Roman" panose="02020603050405020304" pitchFamily="18" charset="0"/>
-              </a:rPr>
-              <a:t>2019</a:t>
-            </a:r>
-            <a:r>
-              <a:rPr lang="en-US" kern="950" dirty="0">
-                <a:effectLst/>
-                <a:latin typeface="Aptos" panose="020B0004020202020204" pitchFamily="34" charset="0"/>
-                <a:ea typeface="Times New Roman" panose="02020603050405020304" pitchFamily="18" charset="0"/>
-                <a:cs typeface="Times New Roman" panose="02020603050405020304" pitchFamily="18" charset="0"/>
-              </a:rPr>
-              <a:t>, </a:t>
-            </a:r>
-            <a:r>
-              <a:rPr lang="en-US" i="1" kern="950" dirty="0">
-                <a:effectLst/>
-                <a:latin typeface="Aptos" panose="020B0004020202020204" pitchFamily="34" charset="0"/>
-                <a:ea typeface="Times New Roman" panose="02020603050405020304" pitchFamily="18" charset="0"/>
-                <a:cs typeface="Times New Roman" panose="02020603050405020304" pitchFamily="18" charset="0"/>
-              </a:rPr>
-              <a:t>7</a:t>
-            </a:r>
-            <a:r>
-              <a:rPr lang="en-US" kern="950" dirty="0">
-                <a:effectLst/>
-                <a:latin typeface="Aptos" panose="020B0004020202020204" pitchFamily="34" charset="0"/>
-                <a:ea typeface="Times New Roman" panose="02020603050405020304" pitchFamily="18" charset="0"/>
-                <a:cs typeface="Times New Roman" panose="02020603050405020304" pitchFamily="18" charset="0"/>
-              </a:rPr>
-              <a:t>, 11944-11952. </a:t>
-            </a:r>
-            <a:endParaRPr lang="en-GB" kern="950" dirty="0">
-              <a:effectLst/>
-              <a:latin typeface="Aptos" panose="020B0004020202020204" pitchFamily="34" charset="0"/>
-              <a:ea typeface="Times New Roman" panose="02020603050405020304" pitchFamily="18" charset="0"/>
-              <a:cs typeface="Times New Roman" panose="02020603050405020304" pitchFamily="18" charset="0"/>
-            </a:endParaRPr>
-          </a:p>
-        </p:txBody>
-      </p:sp>
-      <p:pic>
-        <p:nvPicPr>
-          <p:cNvPr id="7" name="Picture 6">
-            <a:extLst>
-              <a:ext uri="{FF2B5EF4-FFF2-40B4-BE49-F238E27FC236}">
-                <a16:creationId xmlns:a16="http://schemas.microsoft.com/office/drawing/2014/main" id="{0F239F1B-294F-161D-2B7C-1241DEBF801A}"/>
-              </a:ext>
-            </a:extLst>
-          </p:cNvPr>
-          <p:cNvPicPr>
-            <a:picLocks noChangeAspect="1"/>
-          </p:cNvPicPr>
-          <p:nvPr/>
-        </p:nvPicPr>
-        <p:blipFill rotWithShape="1">
-          <a:blip r:embed="rId2"/>
-          <a:srcRect t="110"/>
-          <a:stretch/>
-        </p:blipFill>
-        <p:spPr>
-          <a:xfrm>
-            <a:off x="442805" y="1032799"/>
-            <a:ext cx="6307832" cy="4398259"/>
-          </a:xfrm>
-          <a:prstGeom prst="rect">
-            <a:avLst/>
-          </a:prstGeom>
-        </p:spPr>
-      </p:pic>
-      <p:sp>
-        <p:nvSpPr>
-          <p:cNvPr id="10" name="TextBox 9">
-            <a:extLst>
-              <a:ext uri="{FF2B5EF4-FFF2-40B4-BE49-F238E27FC236}">
-                <a16:creationId xmlns:a16="http://schemas.microsoft.com/office/drawing/2014/main" id="{1599A986-336B-09F0-48B8-33BB1D4BF7D5}"/>
-              </a:ext>
-            </a:extLst>
-          </p:cNvPr>
-          <p:cNvSpPr txBox="1"/>
-          <p:nvPr/>
-        </p:nvSpPr>
-        <p:spPr>
-          <a:xfrm>
-            <a:off x="958840" y="5701542"/>
-            <a:ext cx="10274317" cy="523220"/>
-          </a:xfrm>
-          <a:prstGeom prst="rect">
-            <a:avLst/>
-          </a:prstGeom>
-          <a:noFill/>
-        </p:spPr>
-        <p:txBody>
-          <a:bodyPr wrap="square">
-            <a:spAutoFit/>
-          </a:bodyPr>
-          <a:lstStyle/>
-          <a:p>
-            <a:pPr algn="ctr">
-              <a:spcAft>
-                <a:spcPts val="800"/>
-              </a:spcAft>
-            </a:pPr>
-            <a:r>
-              <a:rPr lang="en-GB" sz="2800" kern="950" dirty="0">
-                <a:effectLst/>
-                <a:latin typeface="Aptos" panose="020B0004020202020204" pitchFamily="34" charset="0"/>
-                <a:ea typeface="Times New Roman" panose="02020603050405020304" pitchFamily="18" charset="0"/>
-                <a:cs typeface="Times New Roman" panose="02020603050405020304" pitchFamily="18" charset="0"/>
-              </a:rPr>
-              <a:t>Experiment: no metallic conductivity in ~1000⨯1000 </a:t>
-            </a:r>
-            <a:r>
-              <a:rPr lang="en-GB" sz="2800" kern="950" dirty="0" err="1">
-                <a:effectLst/>
-                <a:latin typeface="Aptos" panose="020B0004020202020204" pitchFamily="34" charset="0"/>
-                <a:ea typeface="Times New Roman" panose="02020603050405020304" pitchFamily="18" charset="0"/>
-                <a:cs typeface="Times New Roman" panose="02020603050405020304" pitchFamily="18" charset="0"/>
-              </a:rPr>
-              <a:t>Å</a:t>
-            </a:r>
-            <a:r>
-              <a:rPr lang="en-GB" sz="2800" kern="950" dirty="0">
-                <a:effectLst/>
-                <a:latin typeface="Aptos" panose="020B0004020202020204" pitchFamily="34" charset="0"/>
-                <a:ea typeface="Times New Roman" panose="02020603050405020304" pitchFamily="18" charset="0"/>
-                <a:cs typeface="Times New Roman" panose="02020603050405020304" pitchFamily="18" charset="0"/>
-              </a:rPr>
-              <a:t> sheets!</a:t>
-            </a:r>
-          </a:p>
-        </p:txBody>
-      </p:sp>
-      <p:sp>
-        <p:nvSpPr>
-          <p:cNvPr id="2" name="TextBox 1">
-            <a:extLst>
-              <a:ext uri="{FF2B5EF4-FFF2-40B4-BE49-F238E27FC236}">
-                <a16:creationId xmlns:a16="http://schemas.microsoft.com/office/drawing/2014/main" id="{5DC55D1A-5700-52C3-BC5B-DE753F8BDD09}"/>
-              </a:ext>
-            </a:extLst>
-          </p:cNvPr>
-          <p:cNvSpPr txBox="1"/>
-          <p:nvPr/>
-        </p:nvSpPr>
-        <p:spPr>
-          <a:xfrm>
-            <a:off x="-1" y="6493330"/>
-            <a:ext cx="3773214" cy="369332"/>
-          </a:xfrm>
-          <a:prstGeom prst="rect">
-            <a:avLst/>
-          </a:prstGeom>
-          <a:noFill/>
-        </p:spPr>
-        <p:txBody>
-          <a:bodyPr wrap="square">
-            <a:spAutoFit/>
-          </a:bodyPr>
-          <a:lstStyle/>
-          <a:p>
-            <a:r>
-              <a:rPr lang="en-GB" i="1" dirty="0">
-                <a:solidFill>
-                  <a:srgbClr val="000000"/>
-                </a:solidFill>
-                <a:latin typeface="Aptos" panose="020B0004020202020204" pitchFamily="34" charset="0"/>
-              </a:rPr>
-              <a:t>Nature Commun.</a:t>
-            </a:r>
-            <a:r>
-              <a:rPr lang="en-GB" dirty="0">
-                <a:solidFill>
-                  <a:srgbClr val="000000"/>
-                </a:solidFill>
-                <a:latin typeface="Aptos" panose="020B0004020202020204" pitchFamily="34" charset="0"/>
-              </a:rPr>
-              <a:t> </a:t>
-            </a:r>
-            <a:r>
-              <a:rPr lang="en-GB" b="1" dirty="0">
-                <a:solidFill>
-                  <a:srgbClr val="000000"/>
-                </a:solidFill>
-                <a:latin typeface="Aptos" panose="020B0004020202020204" pitchFamily="34" charset="0"/>
-              </a:rPr>
-              <a:t>2023</a:t>
-            </a:r>
-            <a:r>
-              <a:rPr lang="en-GB" dirty="0">
-                <a:solidFill>
-                  <a:srgbClr val="000000"/>
-                </a:solidFill>
-                <a:latin typeface="Aptos" panose="020B0004020202020204" pitchFamily="34" charset="0"/>
-              </a:rPr>
-              <a:t>, </a:t>
-            </a:r>
-            <a:r>
-              <a:rPr lang="en-GB" i="1" dirty="0">
-                <a:latin typeface="Aptos" panose="020B0004020202020204" pitchFamily="34" charset="0"/>
-              </a:rPr>
-              <a:t>14</a:t>
-            </a:r>
-            <a:r>
-              <a:rPr lang="en-GB" dirty="0">
-                <a:latin typeface="Aptos" panose="020B0004020202020204" pitchFamily="34" charset="0"/>
-              </a:rPr>
-              <a:t>, 6308.</a:t>
-            </a:r>
-            <a:endParaRPr lang="en-GB" b="0" i="0" u="none" strike="noStrike" dirty="0">
-              <a:solidFill>
-                <a:srgbClr val="000000"/>
-              </a:solidFill>
-              <a:effectLst/>
-              <a:latin typeface="Aptos" panose="020B0004020202020204" pitchFamily="34" charset="0"/>
-              <a:ea typeface="Helvetica Neue" panose="02000503000000020004" pitchFamily="2" charset="0"/>
-              <a:cs typeface="Helvetica Neue" panose="02000503000000020004" pitchFamily="2" charset="0"/>
-            </a:endParaRPr>
-          </a:p>
-        </p:txBody>
-      </p:sp>
-    </p:spTree>
-    <p:extLst>
-      <p:ext uri="{BB962C8B-B14F-4D97-AF65-F5344CB8AC3E}">
-        <p14:creationId xmlns:p14="http://schemas.microsoft.com/office/powerpoint/2010/main" val="1022287784"/>
-      </p:ext>
-    </p:extLst>
-  </p:cSld>
-  <p:clrMapOvr>
-    <a:masterClrMapping/>
-  </p:clrMapOvr>
-</p:sld>
-</file>
-
 <file path=ppt/slides/slide15.xml><?xml version="1.0" encoding="utf-8"?>
 <p:sld xmlns:a="http://schemas.openxmlformats.org/drawingml/2006/main" xmlns:r="http://schemas.openxmlformats.org/officeDocument/2006/relationships" xmlns:p="http://schemas.openxmlformats.org/presentationml/2006/main">
   <p:cSld>
@@ -6584,8 +6235,8 @@
         </p:nvSpPr>
         <p:spPr>
           <a:xfrm>
-            <a:off x="0" y="1"/>
-            <a:ext cx="12192000" cy="714702"/>
+            <a:off x="-1" y="1"/>
+            <a:ext cx="12192001" cy="764230"/>
           </a:xfrm>
         </p:spPr>
         <p:txBody>
@@ -6599,17 +6250,335 @@
               <a:rPr lang="en-GB" sz="2800" dirty="0">
                 <a:latin typeface="Aptos" panose="020B0004020202020204" pitchFamily="34" charset="0"/>
               </a:rPr>
-              <a:t>Frontier bands of Zn porphene</a:t>
-            </a:r>
+              <a:t>Theory: Zn porphene is a metallic conductor</a:t>
+            </a:r>
+            <a:endParaRPr lang="en-GB" sz="2800" b="1" dirty="0">
+              <a:latin typeface="Aptos" panose="020B0004020202020204" pitchFamily="34" charset="0"/>
+            </a:endParaRPr>
+          </a:p>
+        </p:txBody>
+      </p:sp>
+      <p:sp>
+        <p:nvSpPr>
+          <p:cNvPr id="3" name="TextBox 2">
+            <a:extLst>
+              <a:ext uri="{FF2B5EF4-FFF2-40B4-BE49-F238E27FC236}">
+                <a16:creationId xmlns:a16="http://schemas.microsoft.com/office/drawing/2014/main" id="{2518C291-F242-72F5-9E34-9ED13BF34F66}"/>
+              </a:ext>
+            </a:extLst>
+          </p:cNvPr>
+          <p:cNvSpPr txBox="1"/>
+          <p:nvPr/>
+        </p:nvSpPr>
+        <p:spPr>
+          <a:xfrm>
+            <a:off x="7140115" y="1987717"/>
+            <a:ext cx="5051886" cy="1887696"/>
+          </a:xfrm>
+          <a:prstGeom prst="rect">
+            <a:avLst/>
+          </a:prstGeom>
+          <a:noFill/>
+        </p:spPr>
+        <p:txBody>
+          <a:bodyPr wrap="square">
+            <a:spAutoFit/>
+          </a:bodyPr>
+          <a:lstStyle/>
+          <a:p>
+            <a:pPr>
+              <a:spcAft>
+                <a:spcPts val="800"/>
+              </a:spcAft>
+            </a:pPr>
+            <a:r>
+              <a:rPr lang="en-US" i="1" kern="950" dirty="0">
+                <a:effectLst/>
+                <a:latin typeface="Aptos" panose="020B0004020202020204" pitchFamily="34" charset="0"/>
+                <a:ea typeface="Times New Roman" panose="02020603050405020304" pitchFamily="18" charset="0"/>
+                <a:cs typeface="Times New Roman" panose="02020603050405020304" pitchFamily="18" charset="0"/>
+              </a:rPr>
+              <a:t>Int. J. Quantum Chem. </a:t>
+            </a:r>
+            <a:r>
+              <a:rPr lang="en-US" b="1" kern="950" dirty="0">
+                <a:effectLst/>
+                <a:latin typeface="Aptos" panose="020B0004020202020204" pitchFamily="34" charset="0"/>
+                <a:ea typeface="Times New Roman" panose="02020603050405020304" pitchFamily="18" charset="0"/>
+                <a:cs typeface="Times New Roman" panose="02020603050405020304" pitchFamily="18" charset="0"/>
+              </a:rPr>
+              <a:t>2009</a:t>
+            </a:r>
+            <a:r>
+              <a:rPr lang="en-US" kern="950" dirty="0">
+                <a:effectLst/>
+                <a:latin typeface="Aptos" panose="020B0004020202020204" pitchFamily="34" charset="0"/>
+                <a:ea typeface="Times New Roman" panose="02020603050405020304" pitchFamily="18" charset="0"/>
+                <a:cs typeface="Times New Roman" panose="02020603050405020304" pitchFamily="18" charset="0"/>
+              </a:rPr>
+              <a:t>, </a:t>
+            </a:r>
+            <a:r>
+              <a:rPr lang="en-US" i="1" kern="950" dirty="0">
+                <a:effectLst/>
+                <a:latin typeface="Aptos" panose="020B0004020202020204" pitchFamily="34" charset="0"/>
+                <a:ea typeface="Times New Roman" panose="02020603050405020304" pitchFamily="18" charset="0"/>
+                <a:cs typeface="Times New Roman" panose="02020603050405020304" pitchFamily="18" charset="0"/>
+              </a:rPr>
+              <a:t>109</a:t>
+            </a:r>
+            <a:r>
+              <a:rPr lang="en-US" kern="950" dirty="0">
+                <a:effectLst/>
+                <a:latin typeface="Aptos" panose="020B0004020202020204" pitchFamily="34" charset="0"/>
+                <a:ea typeface="Times New Roman" panose="02020603050405020304" pitchFamily="18" charset="0"/>
+                <a:cs typeface="Times New Roman" panose="02020603050405020304" pitchFamily="18" charset="0"/>
+              </a:rPr>
+              <a:t>, 1584-1597. </a:t>
+            </a:r>
+            <a:endParaRPr lang="en-GB" kern="950" dirty="0">
+              <a:effectLst/>
+              <a:latin typeface="Aptos" panose="020B0004020202020204" pitchFamily="34" charset="0"/>
+              <a:ea typeface="Times New Roman" panose="02020603050405020304" pitchFamily="18" charset="0"/>
+              <a:cs typeface="Times New Roman" panose="02020603050405020304" pitchFamily="18" charset="0"/>
+            </a:endParaRPr>
+          </a:p>
+          <a:p>
+            <a:pPr>
+              <a:spcAft>
+                <a:spcPts val="800"/>
+              </a:spcAft>
+            </a:pPr>
+            <a:r>
+              <a:rPr lang="en-US" i="1" kern="950" dirty="0">
+                <a:effectLst/>
+                <a:latin typeface="Aptos" panose="020B0004020202020204" pitchFamily="34" charset="0"/>
+                <a:ea typeface="Times New Roman" panose="02020603050405020304" pitchFamily="18" charset="0"/>
+                <a:cs typeface="Times New Roman" panose="02020603050405020304" pitchFamily="18" charset="0"/>
+              </a:rPr>
+              <a:t>Int. J. Quantum Chem. </a:t>
+            </a:r>
+            <a:r>
+              <a:rPr lang="en-US" b="1" kern="950" dirty="0">
+                <a:effectLst/>
+                <a:latin typeface="Aptos" panose="020B0004020202020204" pitchFamily="34" charset="0"/>
+                <a:ea typeface="Times New Roman" panose="02020603050405020304" pitchFamily="18" charset="0"/>
+                <a:cs typeface="Times New Roman" panose="02020603050405020304" pitchFamily="18" charset="0"/>
+              </a:rPr>
+              <a:t>2011</a:t>
+            </a:r>
+            <a:r>
+              <a:rPr lang="en-US" kern="950" dirty="0">
+                <a:effectLst/>
+                <a:latin typeface="Aptos" panose="020B0004020202020204" pitchFamily="34" charset="0"/>
+                <a:ea typeface="Times New Roman" panose="02020603050405020304" pitchFamily="18" charset="0"/>
+                <a:cs typeface="Times New Roman" panose="02020603050405020304" pitchFamily="18" charset="0"/>
+              </a:rPr>
+              <a:t>, </a:t>
+            </a:r>
+            <a:r>
+              <a:rPr lang="en-US" i="1" kern="950" dirty="0">
+                <a:effectLst/>
+                <a:latin typeface="Aptos" panose="020B0004020202020204" pitchFamily="34" charset="0"/>
+                <a:ea typeface="Times New Roman" panose="02020603050405020304" pitchFamily="18" charset="0"/>
+                <a:cs typeface="Times New Roman" panose="02020603050405020304" pitchFamily="18" charset="0"/>
+              </a:rPr>
+              <a:t>111</a:t>
+            </a:r>
+            <a:r>
+              <a:rPr lang="en-US" kern="950" dirty="0">
+                <a:effectLst/>
+                <a:latin typeface="Aptos" panose="020B0004020202020204" pitchFamily="34" charset="0"/>
+                <a:ea typeface="Times New Roman" panose="02020603050405020304" pitchFamily="18" charset="0"/>
+                <a:cs typeface="Times New Roman" panose="02020603050405020304" pitchFamily="18" charset="0"/>
+              </a:rPr>
+              <a:t>, 3230-3238. </a:t>
+            </a:r>
+            <a:endParaRPr lang="en-GB" kern="950" dirty="0">
+              <a:effectLst/>
+              <a:latin typeface="Aptos" panose="020B0004020202020204" pitchFamily="34" charset="0"/>
+              <a:ea typeface="Times New Roman" panose="02020603050405020304" pitchFamily="18" charset="0"/>
+              <a:cs typeface="Times New Roman" panose="02020603050405020304" pitchFamily="18" charset="0"/>
+            </a:endParaRPr>
+          </a:p>
+          <a:p>
+            <a:pPr>
+              <a:spcAft>
+                <a:spcPts val="800"/>
+              </a:spcAft>
+            </a:pPr>
+            <a:r>
+              <a:rPr lang="en-US" i="1" kern="950" dirty="0">
+                <a:effectLst/>
+                <a:latin typeface="Aptos" panose="020B0004020202020204" pitchFamily="34" charset="0"/>
+                <a:ea typeface="Times New Roman" panose="02020603050405020304" pitchFamily="18" charset="0"/>
+                <a:cs typeface="Times New Roman" panose="02020603050405020304" pitchFamily="18" charset="0"/>
+              </a:rPr>
+              <a:t>RSC Adv. </a:t>
+            </a:r>
+            <a:r>
+              <a:rPr lang="en-US" b="1" kern="950" dirty="0">
+                <a:effectLst/>
+                <a:latin typeface="Aptos" panose="020B0004020202020204" pitchFamily="34" charset="0"/>
+                <a:ea typeface="Times New Roman" panose="02020603050405020304" pitchFamily="18" charset="0"/>
+                <a:cs typeface="Times New Roman" panose="02020603050405020304" pitchFamily="18" charset="0"/>
+              </a:rPr>
+              <a:t>2013</a:t>
+            </a:r>
+            <a:r>
+              <a:rPr lang="en-US" kern="950" dirty="0">
+                <a:effectLst/>
+                <a:latin typeface="Aptos" panose="020B0004020202020204" pitchFamily="34" charset="0"/>
+                <a:ea typeface="Times New Roman" panose="02020603050405020304" pitchFamily="18" charset="0"/>
+                <a:cs typeface="Times New Roman" panose="02020603050405020304" pitchFamily="18" charset="0"/>
+              </a:rPr>
+              <a:t>, </a:t>
+            </a:r>
+            <a:r>
+              <a:rPr lang="en-US" i="1" kern="950" dirty="0">
+                <a:effectLst/>
+                <a:latin typeface="Aptos" panose="020B0004020202020204" pitchFamily="34" charset="0"/>
+                <a:ea typeface="Times New Roman" panose="02020603050405020304" pitchFamily="18" charset="0"/>
+                <a:cs typeface="Times New Roman" panose="02020603050405020304" pitchFamily="18" charset="0"/>
+              </a:rPr>
+              <a:t>3</a:t>
+            </a:r>
+            <a:r>
+              <a:rPr lang="en-US" kern="950" dirty="0">
+                <a:effectLst/>
+                <a:latin typeface="Aptos" panose="020B0004020202020204" pitchFamily="34" charset="0"/>
+                <a:ea typeface="Times New Roman" panose="02020603050405020304" pitchFamily="18" charset="0"/>
+                <a:cs typeface="Times New Roman" panose="02020603050405020304" pitchFamily="18" charset="0"/>
+              </a:rPr>
+              <a:t>, 7016-7022</a:t>
+            </a:r>
+            <a:r>
+              <a:rPr lang="en-US" kern="950" dirty="0">
+                <a:latin typeface="Aptos" panose="020B0004020202020204" pitchFamily="34" charset="0"/>
+                <a:ea typeface="Times New Roman" panose="02020603050405020304" pitchFamily="18" charset="0"/>
+                <a:cs typeface="Times New Roman" panose="02020603050405020304" pitchFamily="18" charset="0"/>
+              </a:rPr>
+              <a:t>.</a:t>
+            </a:r>
+          </a:p>
+          <a:p>
+            <a:pPr>
+              <a:spcAft>
+                <a:spcPts val="800"/>
+              </a:spcAft>
+            </a:pPr>
+            <a:r>
+              <a:rPr lang="en-US" i="1" kern="950" dirty="0">
+                <a:effectLst/>
+                <a:latin typeface="Aptos" panose="020B0004020202020204" pitchFamily="34" charset="0"/>
+                <a:ea typeface="Times New Roman" panose="02020603050405020304" pitchFamily="18" charset="0"/>
+                <a:cs typeface="Times New Roman" panose="02020603050405020304" pitchFamily="18" charset="0"/>
+              </a:rPr>
+              <a:t>J. Phys. Chem. C </a:t>
+            </a:r>
+            <a:r>
+              <a:rPr lang="en-US" b="1" kern="950" dirty="0">
+                <a:effectLst/>
+                <a:latin typeface="Aptos" panose="020B0004020202020204" pitchFamily="34" charset="0"/>
+                <a:ea typeface="Times New Roman" panose="02020603050405020304" pitchFamily="18" charset="0"/>
+                <a:cs typeface="Times New Roman" panose="02020603050405020304" pitchFamily="18" charset="0"/>
+              </a:rPr>
+              <a:t>2018</a:t>
+            </a:r>
+            <a:r>
+              <a:rPr lang="en-US" kern="950" dirty="0">
+                <a:effectLst/>
+                <a:latin typeface="Aptos" panose="020B0004020202020204" pitchFamily="34" charset="0"/>
+                <a:ea typeface="Times New Roman" panose="02020603050405020304" pitchFamily="18" charset="0"/>
+                <a:cs typeface="Times New Roman" panose="02020603050405020304" pitchFamily="18" charset="0"/>
+              </a:rPr>
+              <a:t>, </a:t>
+            </a:r>
+            <a:r>
+              <a:rPr lang="en-US" i="1" kern="950" dirty="0">
+                <a:effectLst/>
+                <a:latin typeface="Aptos" panose="020B0004020202020204" pitchFamily="34" charset="0"/>
+                <a:ea typeface="Times New Roman" panose="02020603050405020304" pitchFamily="18" charset="0"/>
+                <a:cs typeface="Times New Roman" panose="02020603050405020304" pitchFamily="18" charset="0"/>
+              </a:rPr>
+              <a:t>122</a:t>
+            </a:r>
+            <a:r>
+              <a:rPr lang="en-US" kern="950" dirty="0">
+                <a:effectLst/>
+                <a:latin typeface="Aptos" panose="020B0004020202020204" pitchFamily="34" charset="0"/>
+                <a:ea typeface="Times New Roman" panose="02020603050405020304" pitchFamily="18" charset="0"/>
+                <a:cs typeface="Times New Roman" panose="02020603050405020304" pitchFamily="18" charset="0"/>
+              </a:rPr>
+              <a:t>, 23790-23798.</a:t>
+            </a:r>
+          </a:p>
+          <a:p>
+            <a:pPr>
+              <a:spcAft>
+                <a:spcPts val="800"/>
+              </a:spcAft>
+            </a:pPr>
+            <a:r>
+              <a:rPr lang="en-US" i="1" kern="950" dirty="0">
+                <a:effectLst/>
+                <a:latin typeface="Aptos" panose="020B0004020202020204" pitchFamily="34" charset="0"/>
+                <a:ea typeface="Times New Roman" panose="02020603050405020304" pitchFamily="18" charset="0"/>
+                <a:cs typeface="Times New Roman" panose="02020603050405020304" pitchFamily="18" charset="0"/>
+              </a:rPr>
+              <a:t>J. Mater. Chem. A </a:t>
+            </a:r>
+            <a:r>
+              <a:rPr lang="en-US" b="1" kern="950" dirty="0">
+                <a:effectLst/>
+                <a:latin typeface="Aptos" panose="020B0004020202020204" pitchFamily="34" charset="0"/>
+                <a:ea typeface="Times New Roman" panose="02020603050405020304" pitchFamily="18" charset="0"/>
+                <a:cs typeface="Times New Roman" panose="02020603050405020304" pitchFamily="18" charset="0"/>
+              </a:rPr>
+              <a:t>2019</a:t>
+            </a:r>
+            <a:r>
+              <a:rPr lang="en-US" kern="950" dirty="0">
+                <a:effectLst/>
+                <a:latin typeface="Aptos" panose="020B0004020202020204" pitchFamily="34" charset="0"/>
+                <a:ea typeface="Times New Roman" panose="02020603050405020304" pitchFamily="18" charset="0"/>
+                <a:cs typeface="Times New Roman" panose="02020603050405020304" pitchFamily="18" charset="0"/>
+              </a:rPr>
+              <a:t>, </a:t>
+            </a:r>
+            <a:r>
+              <a:rPr lang="en-US" i="1" kern="950" dirty="0">
+                <a:effectLst/>
+                <a:latin typeface="Aptos" panose="020B0004020202020204" pitchFamily="34" charset="0"/>
+                <a:ea typeface="Times New Roman" panose="02020603050405020304" pitchFamily="18" charset="0"/>
+                <a:cs typeface="Times New Roman" panose="02020603050405020304" pitchFamily="18" charset="0"/>
+              </a:rPr>
+              <a:t>7</a:t>
+            </a:r>
+            <a:r>
+              <a:rPr lang="en-US" kern="950" dirty="0">
+                <a:effectLst/>
+                <a:latin typeface="Aptos" panose="020B0004020202020204" pitchFamily="34" charset="0"/>
+                <a:ea typeface="Times New Roman" panose="02020603050405020304" pitchFamily="18" charset="0"/>
+                <a:cs typeface="Times New Roman" panose="02020603050405020304" pitchFamily="18" charset="0"/>
+              </a:rPr>
+              <a:t>, 11944-11952. </a:t>
+            </a:r>
+            <a:endParaRPr lang="en-GB" kern="950" dirty="0">
+              <a:effectLst/>
+              <a:latin typeface="Aptos" panose="020B0004020202020204" pitchFamily="34" charset="0"/>
+              <a:ea typeface="Times New Roman" panose="02020603050405020304" pitchFamily="18" charset="0"/>
+              <a:cs typeface="Times New Roman" panose="02020603050405020304" pitchFamily="18" charset="0"/>
+            </a:endParaRPr>
           </a:p>
         </p:txBody>
       </p:sp>
       <p:pic>
         <p:nvPicPr>
-          <p:cNvPr id="9" name="Picture 8">
-            <a:extLst>
-              <a:ext uri="{FF2B5EF4-FFF2-40B4-BE49-F238E27FC236}">
-                <a16:creationId xmlns:a16="http://schemas.microsoft.com/office/drawing/2014/main" id="{7B982635-38ED-A13E-A92E-D118E66C2A7E}"/>
+          <p:cNvPr id="7" name="Picture 6">
+            <a:extLst>
+              <a:ext uri="{FF2B5EF4-FFF2-40B4-BE49-F238E27FC236}">
+                <a16:creationId xmlns:a16="http://schemas.microsoft.com/office/drawing/2014/main" id="{0F239F1B-294F-161D-2B7C-1241DEBF801A}"/>
               </a:ext>
             </a:extLst>
           </p:cNvPr>
@@ -6620,145 +6589,35 @@
         </p:nvPicPr>
         <p:blipFill rotWithShape="1">
           <a:blip r:embed="rId2"/>
-          <a:srcRect b="28588"/>
+          <a:srcRect t="110"/>
           <a:stretch/>
         </p:blipFill>
         <p:spPr>
           <a:xfrm>
-            <a:off x="2241584" y="1053420"/>
-            <a:ext cx="5411794" cy="4999908"/>
+            <a:off x="442805" y="1032799"/>
+            <a:ext cx="6307832" cy="4398259"/>
           </a:xfrm>
           <a:prstGeom prst="rect">
             <a:avLst/>
           </a:prstGeom>
         </p:spPr>
       </p:pic>
-      <p:pic>
-        <p:nvPicPr>
-          <p:cNvPr id="10" name="Picture 9">
-            <a:extLst>
-              <a:ext uri="{FF2B5EF4-FFF2-40B4-BE49-F238E27FC236}">
-                <a16:creationId xmlns:a16="http://schemas.microsoft.com/office/drawing/2014/main" id="{0401B067-9AAE-B4DF-3058-8BBC9CBC1E8C}"/>
-              </a:ext>
-            </a:extLst>
-          </p:cNvPr>
-          <p:cNvPicPr>
-            <a:picLocks noChangeAspect="1"/>
-          </p:cNvPicPr>
-          <p:nvPr/>
-        </p:nvPicPr>
-        <p:blipFill rotWithShape="1">
-          <a:blip r:embed="rId2"/>
-          <a:srcRect l="56469" t="70960" r="3968"/>
-          <a:stretch/>
-        </p:blipFill>
-        <p:spPr>
-          <a:xfrm flipV="1">
-            <a:off x="70194" y="1066890"/>
-            <a:ext cx="2423160" cy="2301060"/>
-          </a:xfrm>
-          <a:prstGeom prst="rect">
-            <a:avLst/>
-          </a:prstGeom>
-        </p:spPr>
-      </p:pic>
-      <p:pic>
-        <p:nvPicPr>
-          <p:cNvPr id="13" name="Picture 12">
-            <a:extLst>
-              <a:ext uri="{FF2B5EF4-FFF2-40B4-BE49-F238E27FC236}">
-                <a16:creationId xmlns:a16="http://schemas.microsoft.com/office/drawing/2014/main" id="{04854923-88FA-B708-8C1A-F2E8C0FF74F0}"/>
-              </a:ext>
-            </a:extLst>
-          </p:cNvPr>
-          <p:cNvPicPr>
-            <a:picLocks noChangeAspect="1"/>
-          </p:cNvPicPr>
-          <p:nvPr/>
-        </p:nvPicPr>
-        <p:blipFill rotWithShape="1">
-          <a:blip r:embed="rId2"/>
-          <a:srcRect l="10917" t="70960" r="47493"/>
-          <a:stretch/>
-        </p:blipFill>
-        <p:spPr>
-          <a:xfrm flipV="1">
-            <a:off x="8109" y="3568540"/>
-            <a:ext cx="2547330" cy="2301060"/>
-          </a:xfrm>
-          <a:prstGeom prst="rect">
-            <a:avLst/>
-          </a:prstGeom>
-        </p:spPr>
-      </p:pic>
-      <p:sp>
-        <p:nvSpPr>
-          <p:cNvPr id="15" name="Rectangle 14">
-            <a:extLst>
-              <a:ext uri="{FF2B5EF4-FFF2-40B4-BE49-F238E27FC236}">
-                <a16:creationId xmlns:a16="http://schemas.microsoft.com/office/drawing/2014/main" id="{B122A8D6-9252-1EBC-ABD9-AED08FA3F281}"/>
-              </a:ext>
-            </a:extLst>
-          </p:cNvPr>
-          <p:cNvSpPr/>
+      <p:sp>
+        <p:nvSpPr>
+          <p:cNvPr id="10" name="TextBox 9">
+            <a:extLst>
+              <a:ext uri="{FF2B5EF4-FFF2-40B4-BE49-F238E27FC236}">
+                <a16:creationId xmlns:a16="http://schemas.microsoft.com/office/drawing/2014/main" id="{1599A986-336B-09F0-48B8-33BB1D4BF7D5}"/>
+              </a:ext>
+            </a:extLst>
+          </p:cNvPr>
+          <p:cNvSpPr txBox="1"/>
           <p:nvPr/>
         </p:nvSpPr>
         <p:spPr>
           <a:xfrm>
-            <a:off x="4734463" y="1066890"/>
-            <a:ext cx="2547329" cy="4986438"/>
-          </a:xfrm>
-          <a:prstGeom prst="rect">
-            <a:avLst/>
-          </a:prstGeom>
-          <a:solidFill>
-            <a:schemeClr val="bg1"/>
-          </a:solidFill>
-          <a:ln>
-            <a:noFill/>
-          </a:ln>
-        </p:spPr>
-        <p:style>
-          <a:lnRef idx="2">
-            <a:schemeClr val="accent1">
-              <a:shade val="15000"/>
-            </a:schemeClr>
-          </a:lnRef>
-          <a:fillRef idx="1">
-            <a:schemeClr val="accent1"/>
-          </a:fillRef>
-          <a:effectRef idx="0">
-            <a:schemeClr val="accent1"/>
-          </a:effectRef>
-          <a:fontRef idx="minor">
-            <a:schemeClr val="lt1"/>
-          </a:fontRef>
-        </p:style>
-        <p:txBody>
-          <a:bodyPr rtlCol="0" anchor="ctr"/>
-          <a:lstStyle/>
-          <a:p>
-            <a:pPr algn="ctr"/>
-            <a:endParaRPr lang="en-GB"/>
-          </a:p>
-        </p:txBody>
-      </p:sp>
-      <p:sp>
-        <p:nvSpPr>
-          <p:cNvPr id="3" name="TextBox 2">
-            <a:extLst>
-              <a:ext uri="{FF2B5EF4-FFF2-40B4-BE49-F238E27FC236}">
-                <a16:creationId xmlns:a16="http://schemas.microsoft.com/office/drawing/2014/main" id="{B152FAA8-9A94-8864-94FE-DC624D78A02D}"/>
-              </a:ext>
-            </a:extLst>
-          </p:cNvPr>
-          <p:cNvSpPr txBox="1"/>
-          <p:nvPr/>
-        </p:nvSpPr>
-        <p:spPr>
-          <a:xfrm>
-            <a:off x="0" y="6493330"/>
-            <a:ext cx="6096000" cy="369332"/>
+            <a:off x="958840" y="5701542"/>
+            <a:ext cx="10274317" cy="523220"/>
           </a:xfrm>
           <a:prstGeom prst="rect">
             <a:avLst/>
@@ -6771,49 +6630,133 @@
           </a:bodyPr>
           <a:lstStyle/>
           <a:p>
+            <a:pPr algn="ctr">
+              <a:spcAft>
+                <a:spcPts val="800"/>
+              </a:spcAft>
+            </a:pPr>
+            <a:r>
+              <a:rPr lang="en-GB" sz="2800" kern="950" dirty="0">
+                <a:effectLst/>
+                <a:latin typeface="Aptos" panose="020B0004020202020204" pitchFamily="34" charset="0"/>
+                <a:ea typeface="Times New Roman" panose="02020603050405020304" pitchFamily="18" charset="0"/>
+                <a:cs typeface="Times New Roman" panose="02020603050405020304" pitchFamily="18" charset="0"/>
+              </a:rPr>
+              <a:t>Experiment: no metallic conductivity in ~1000⨯1000 </a:t>
+            </a:r>
+            <a:r>
+              <a:rPr lang="en-GB" sz="2800" kern="950" dirty="0" err="1">
+                <a:effectLst/>
+                <a:latin typeface="Aptos" panose="020B0004020202020204" pitchFamily="34" charset="0"/>
+                <a:ea typeface="Times New Roman" panose="02020603050405020304" pitchFamily="18" charset="0"/>
+                <a:cs typeface="Times New Roman" panose="02020603050405020304" pitchFamily="18" charset="0"/>
+              </a:rPr>
+              <a:t>Å</a:t>
+            </a:r>
+            <a:r>
+              <a:rPr lang="en-GB" sz="2800" kern="950" dirty="0">
+                <a:effectLst/>
+                <a:latin typeface="Aptos" panose="020B0004020202020204" pitchFamily="34" charset="0"/>
+                <a:ea typeface="Times New Roman" panose="02020603050405020304" pitchFamily="18" charset="0"/>
+                <a:cs typeface="Times New Roman" panose="02020603050405020304" pitchFamily="18" charset="0"/>
+              </a:rPr>
+              <a:t> sheets!</a:t>
+            </a:r>
+          </a:p>
+        </p:txBody>
+      </p:sp>
+      <p:sp>
+        <p:nvSpPr>
+          <p:cNvPr id="2" name="TextBox 1">
+            <a:extLst>
+              <a:ext uri="{FF2B5EF4-FFF2-40B4-BE49-F238E27FC236}">
+                <a16:creationId xmlns:a16="http://schemas.microsoft.com/office/drawing/2014/main" id="{5DC55D1A-5700-52C3-BC5B-DE753F8BDD09}"/>
+              </a:ext>
+            </a:extLst>
+          </p:cNvPr>
+          <p:cNvSpPr txBox="1"/>
+          <p:nvPr/>
+        </p:nvSpPr>
+        <p:spPr>
+          <a:xfrm>
+            <a:off x="-1" y="6493330"/>
+            <a:ext cx="3773214" cy="369332"/>
+          </a:xfrm>
+          <a:prstGeom prst="rect">
+            <a:avLst/>
+          </a:prstGeom>
+          <a:noFill/>
+        </p:spPr>
+        <p:txBody>
+          <a:bodyPr wrap="square">
+            <a:spAutoFit/>
+          </a:bodyPr>
+          <a:lstStyle/>
+          <a:p>
+            <a:r>
+              <a:rPr lang="en-GB" i="1" dirty="0">
+                <a:solidFill>
+                  <a:srgbClr val="000000"/>
+                </a:solidFill>
+                <a:latin typeface="Aptos" panose="020B0004020202020204" pitchFamily="34" charset="0"/>
+              </a:rPr>
+              <a:t>Nature Commun.</a:t>
+            </a:r>
+            <a:r>
+              <a:rPr lang="en-GB" dirty="0">
+                <a:solidFill>
+                  <a:srgbClr val="000000"/>
+                </a:solidFill>
+                <a:latin typeface="Aptos" panose="020B0004020202020204" pitchFamily="34" charset="0"/>
+              </a:rPr>
+              <a:t> </a:t>
+            </a:r>
+            <a:r>
+              <a:rPr lang="en-GB" b="1" dirty="0">
+                <a:solidFill>
+                  <a:srgbClr val="000000"/>
+                </a:solidFill>
+                <a:latin typeface="Aptos" panose="020B0004020202020204" pitchFamily="34" charset="0"/>
+              </a:rPr>
+              <a:t>2023</a:t>
+            </a:r>
+            <a:r>
+              <a:rPr lang="en-GB" dirty="0">
+                <a:solidFill>
+                  <a:srgbClr val="000000"/>
+                </a:solidFill>
+                <a:latin typeface="Aptos" panose="020B0004020202020204" pitchFamily="34" charset="0"/>
+              </a:rPr>
+              <a:t>, </a:t>
+            </a:r>
             <a:r>
               <a:rPr lang="en-GB" i="1" dirty="0">
                 <a:latin typeface="Aptos" panose="020B0004020202020204" pitchFamily="34" charset="0"/>
               </a:rPr>
-              <a:t>JACS</a:t>
+              <a:t>14</a:t>
             </a:r>
             <a:r>
               <a:rPr lang="en-GB" dirty="0">
                 <a:latin typeface="Aptos" panose="020B0004020202020204" pitchFamily="34" charset="0"/>
               </a:rPr>
-              <a:t> </a:t>
-            </a:r>
-            <a:r>
-              <a:rPr lang="en-GB" b="1" dirty="0">
-                <a:latin typeface="Aptos" panose="020B0004020202020204" pitchFamily="34" charset="0"/>
-              </a:rPr>
-              <a:t>2024</a:t>
-            </a:r>
-            <a:r>
-              <a:rPr lang="en-GB" dirty="0">
-                <a:latin typeface="Aptos" panose="020B0004020202020204" pitchFamily="34" charset="0"/>
-              </a:rPr>
-              <a:t>, </a:t>
-            </a:r>
-            <a:r>
-              <a:rPr lang="en-GB" i="1" dirty="0">
-                <a:latin typeface="Aptos" panose="020B0004020202020204" pitchFamily="34" charset="0"/>
-              </a:rPr>
-              <a:t>146,</a:t>
-            </a:r>
-            <a:r>
-              <a:rPr lang="en-GB" dirty="0">
-                <a:latin typeface="Aptos" panose="020B0004020202020204" pitchFamily="34" charset="0"/>
-              </a:rPr>
-              <a:t> 3992.</a:t>
-            </a:r>
+              <a:t>, 6308.</a:t>
+            </a:r>
+            <a:endParaRPr lang="en-GB" b="0" i="0" u="none" strike="noStrike" dirty="0">
+              <a:solidFill>
+                <a:srgbClr val="000000"/>
+              </a:solidFill>
+              <a:effectLst/>
+              <a:latin typeface="Aptos" panose="020B0004020202020204" pitchFamily="34" charset="0"/>
+              <a:ea typeface="Helvetica Neue" panose="02000503000000020004" pitchFamily="2" charset="0"/>
+              <a:cs typeface="Helvetica Neue" panose="02000503000000020004" pitchFamily="2" charset="0"/>
+            </a:endParaRPr>
           </a:p>
         </p:txBody>
       </p:sp>
     </p:spTree>
     <p:extLst>
       <p:ext uri="{BB962C8B-B14F-4D97-AF65-F5344CB8AC3E}">
-        <p14:creationId xmlns:p14="http://schemas.microsoft.com/office/powerpoint/2010/main" val="1859635727"/>
+        <p14:creationId xmlns:p14="http://schemas.microsoft.com/office/powerpoint/2010/main" val="1022287784"/>
       </p:ext>
     </p:extLst>
   </p:cSld>
@@ -6840,42 +6783,50 @@
           <a:chExt cx="0" cy="0"/>
         </a:xfrm>
       </p:grpSpPr>
+      <p:sp>
+        <p:nvSpPr>
+          <p:cNvPr id="30" name="Title 1">
+            <a:extLst>
+              <a:ext uri="{FF2B5EF4-FFF2-40B4-BE49-F238E27FC236}">
+                <a16:creationId xmlns:a16="http://schemas.microsoft.com/office/drawing/2014/main" id="{3C5D19B2-C404-F9F2-DEE2-88E588E8EE15}"/>
+              </a:ext>
+            </a:extLst>
+          </p:cNvPr>
+          <p:cNvSpPr>
+            <a:spLocks noGrp="1"/>
+          </p:cNvSpPr>
+          <p:nvPr>
+            <p:ph type="title"/>
+          </p:nvPr>
+        </p:nvSpPr>
+        <p:spPr>
+          <a:xfrm>
+            <a:off x="0" y="1"/>
+            <a:ext cx="12192000" cy="714702"/>
+          </a:xfrm>
+        </p:spPr>
+        <p:txBody>
+          <a:bodyPr>
+            <a:normAutofit/>
+          </a:bodyPr>
+          <a:lstStyle/>
+          <a:p>
+            <a:pPr algn="ctr"/>
+            <a:r>
+              <a:rPr lang="en-GB" sz="2800" dirty="0">
+                <a:latin typeface="Aptos" panose="020B0004020202020204" pitchFamily="34" charset="0"/>
+              </a:rPr>
+              <a:t>Frontier bands of Zn porphene</a:t>
+            </a:r>
+          </a:p>
+        </p:txBody>
+      </p:sp>
       <p:pic>
         <p:nvPicPr>
-          <p:cNvPr id="12" name="Picture 11">
-            <a:extLst>
-              <a:ext uri="{FF2B5EF4-FFF2-40B4-BE49-F238E27FC236}">
-                <a16:creationId xmlns:a16="http://schemas.microsoft.com/office/drawing/2014/main" id="{F6836372-7C36-53A5-7A74-F5DDFAED12B7}"/>
-              </a:ext>
-            </a:extLst>
-          </p:cNvPr>
-          <p:cNvPicPr>
-            <a:picLocks noChangeAspect="1"/>
-          </p:cNvPicPr>
-          <p:nvPr/>
-        </p:nvPicPr>
-        <p:blipFill>
-          <a:blip r:embed="rId2"/>
-          <a:stretch>
-            <a:fillRect/>
-          </a:stretch>
-        </p:blipFill>
-        <p:spPr>
-          <a:xfrm>
-            <a:off x="7944787" y="1918366"/>
-            <a:ext cx="4246355" cy="3317225"/>
-          </a:xfrm>
-          <a:prstGeom prst="rect">
-            <a:avLst/>
-          </a:prstGeom>
-        </p:spPr>
-      </p:pic>
-      <p:pic>
-        <p:nvPicPr>
-          <p:cNvPr id="3" name="Picture 2">
-            <a:extLst>
-              <a:ext uri="{FF2B5EF4-FFF2-40B4-BE49-F238E27FC236}">
-                <a16:creationId xmlns:a16="http://schemas.microsoft.com/office/drawing/2014/main" id="{61D29528-DD1E-79AB-6391-CAD70E30BAD7}"/>
+          <p:cNvPr id="9" name="Picture 8">
+            <a:extLst>
+              <a:ext uri="{FF2B5EF4-FFF2-40B4-BE49-F238E27FC236}">
+                <a16:creationId xmlns:a16="http://schemas.microsoft.com/office/drawing/2014/main" id="{7B982635-38ED-A13E-A92E-D118E66C2A7E}"/>
               </a:ext>
             </a:extLst>
           </p:cNvPr>
@@ -6885,7 +6836,7 @@
           <p:nvPr/>
         </p:nvPicPr>
         <p:blipFill rotWithShape="1">
-          <a:blip r:embed="rId3"/>
+          <a:blip r:embed="rId2"/>
           <a:srcRect b="28588"/>
           <a:stretch/>
         </p:blipFill>
@@ -6901,10 +6852,10 @@
       </p:pic>
       <p:pic>
         <p:nvPicPr>
-          <p:cNvPr id="13" name="Picture 12">
-            <a:extLst>
-              <a:ext uri="{FF2B5EF4-FFF2-40B4-BE49-F238E27FC236}">
-                <a16:creationId xmlns:a16="http://schemas.microsoft.com/office/drawing/2014/main" id="{04854923-88FA-B708-8C1A-F2E8C0FF74F0}"/>
+          <p:cNvPr id="10" name="Picture 9">
+            <a:extLst>
+              <a:ext uri="{FF2B5EF4-FFF2-40B4-BE49-F238E27FC236}">
+                <a16:creationId xmlns:a16="http://schemas.microsoft.com/office/drawing/2014/main" id="{0401B067-9AAE-B4DF-3058-8BBC9CBC1E8C}"/>
               </a:ext>
             </a:extLst>
           </p:cNvPr>
@@ -6914,7 +6865,36 @@
           <p:nvPr/>
         </p:nvPicPr>
         <p:blipFill rotWithShape="1">
-          <a:blip r:embed="rId3"/>
+          <a:blip r:embed="rId2"/>
+          <a:srcRect l="56469" t="70960" r="3968"/>
+          <a:stretch/>
+        </p:blipFill>
+        <p:spPr>
+          <a:xfrm flipV="1">
+            <a:off x="70194" y="1066890"/>
+            <a:ext cx="2423160" cy="2301060"/>
+          </a:xfrm>
+          <a:prstGeom prst="rect">
+            <a:avLst/>
+          </a:prstGeom>
+        </p:spPr>
+      </p:pic>
+      <p:pic>
+        <p:nvPicPr>
+          <p:cNvPr id="13" name="Picture 12">
+            <a:extLst>
+              <a:ext uri="{FF2B5EF4-FFF2-40B4-BE49-F238E27FC236}">
+                <a16:creationId xmlns:a16="http://schemas.microsoft.com/office/drawing/2014/main" id="{04854923-88FA-B708-8C1A-F2E8C0FF74F0}"/>
+              </a:ext>
+            </a:extLst>
+          </p:cNvPr>
+          <p:cNvPicPr>
+            <a:picLocks noChangeAspect="1"/>
+          </p:cNvPicPr>
+          <p:nvPr/>
+        </p:nvPicPr>
+        <p:blipFill rotWithShape="1">
+          <a:blip r:embed="rId2"/>
           <a:srcRect l="10917" t="70960" r="47493"/>
           <a:stretch/>
         </p:blipFill>
@@ -6930,10 +6910,10 @@
       </p:pic>
       <p:sp>
         <p:nvSpPr>
-          <p:cNvPr id="4" name="Rectangle 3">
-            <a:extLst>
-              <a:ext uri="{FF2B5EF4-FFF2-40B4-BE49-F238E27FC236}">
-                <a16:creationId xmlns:a16="http://schemas.microsoft.com/office/drawing/2014/main" id="{E489CD65-A854-5E77-D5F6-9038FB903C3C}"/>
+          <p:cNvPr id="15" name="Rectangle 14">
+            <a:extLst>
+              <a:ext uri="{FF2B5EF4-FFF2-40B4-BE49-F238E27FC236}">
+                <a16:creationId xmlns:a16="http://schemas.microsoft.com/office/drawing/2014/main" id="{B122A8D6-9252-1EBC-ABD9-AED08FA3F281}"/>
               </a:ext>
             </a:extLst>
           </p:cNvPr>
@@ -6980,79 +6960,12 @@
           </a:p>
         </p:txBody>
       </p:sp>
-      <p:pic>
-        <p:nvPicPr>
-          <p:cNvPr id="10" name="Picture 9">
-            <a:extLst>
-              <a:ext uri="{FF2B5EF4-FFF2-40B4-BE49-F238E27FC236}">
-                <a16:creationId xmlns:a16="http://schemas.microsoft.com/office/drawing/2014/main" id="{0401B067-9AAE-B4DF-3058-8BBC9CBC1E8C}"/>
-              </a:ext>
-            </a:extLst>
-          </p:cNvPr>
-          <p:cNvPicPr>
-            <a:picLocks noChangeAspect="1"/>
-          </p:cNvPicPr>
-          <p:nvPr/>
-        </p:nvPicPr>
-        <p:blipFill rotWithShape="1">
-          <a:blip r:embed="rId3"/>
-          <a:srcRect l="56469" t="70960" r="3968"/>
-          <a:stretch/>
-        </p:blipFill>
-        <p:spPr>
-          <a:xfrm flipV="1">
-            <a:off x="70194" y="1066890"/>
-            <a:ext cx="2423160" cy="2301060"/>
-          </a:xfrm>
-          <a:prstGeom prst="rect">
-            <a:avLst/>
-          </a:prstGeom>
-        </p:spPr>
-      </p:pic>
-      <p:sp>
-        <p:nvSpPr>
-          <p:cNvPr id="2" name="Title 1">
-            <a:extLst>
-              <a:ext uri="{FF2B5EF4-FFF2-40B4-BE49-F238E27FC236}">
-                <a16:creationId xmlns:a16="http://schemas.microsoft.com/office/drawing/2014/main" id="{532501DB-802D-828C-CF13-9C32CEA065AA}"/>
-              </a:ext>
-            </a:extLst>
-          </p:cNvPr>
-          <p:cNvSpPr>
-            <a:spLocks noGrp="1"/>
-          </p:cNvSpPr>
-          <p:nvPr>
-            <p:ph type="title"/>
-          </p:nvPr>
-        </p:nvSpPr>
-        <p:spPr>
-          <a:xfrm>
-            <a:off x="0" y="1"/>
-            <a:ext cx="12192000" cy="714702"/>
-          </a:xfrm>
-        </p:spPr>
-        <p:txBody>
-          <a:bodyPr>
-            <a:normAutofit/>
-          </a:bodyPr>
-          <a:lstStyle/>
-          <a:p>
-            <a:pPr algn="ctr"/>
-            <a:r>
-              <a:rPr lang="en-GB" sz="2800" dirty="0">
-                <a:latin typeface="Aptos" panose="020B0004020202020204" pitchFamily="34" charset="0"/>
-              </a:rPr>
-              <a:t>Frontier bands of Zn porphene</a:t>
-            </a:r>
-          </a:p>
-        </p:txBody>
-      </p:sp>
-      <p:sp>
-        <p:nvSpPr>
-          <p:cNvPr id="6" name="TextBox 5">
-            <a:extLst>
-              <a:ext uri="{FF2B5EF4-FFF2-40B4-BE49-F238E27FC236}">
-                <a16:creationId xmlns:a16="http://schemas.microsoft.com/office/drawing/2014/main" id="{9920A2D3-A328-C74C-42F3-D88C44E020CC}"/>
+      <p:sp>
+        <p:nvSpPr>
+          <p:cNvPr id="3" name="TextBox 2">
+            <a:extLst>
+              <a:ext uri="{FF2B5EF4-FFF2-40B4-BE49-F238E27FC236}">
+                <a16:creationId xmlns:a16="http://schemas.microsoft.com/office/drawing/2014/main" id="{B152FAA8-9A94-8864-94FE-DC624D78A02D}"/>
               </a:ext>
             </a:extLst>
           </p:cNvPr>
@@ -7117,7 +7030,7 @@
     </p:spTree>
     <p:extLst>
       <p:ext uri="{BB962C8B-B14F-4D97-AF65-F5344CB8AC3E}">
-        <p14:creationId xmlns:p14="http://schemas.microsoft.com/office/powerpoint/2010/main" val="1499941626"/>
+        <p14:creationId xmlns:p14="http://schemas.microsoft.com/office/powerpoint/2010/main" val="1859635727"/>
       </p:ext>
     </p:extLst>
   </p:cSld>
@@ -7146,6 +7059,310 @@
       </p:grpSpPr>
       <p:pic>
         <p:nvPicPr>
+          <p:cNvPr id="12" name="Picture 11">
+            <a:extLst>
+              <a:ext uri="{FF2B5EF4-FFF2-40B4-BE49-F238E27FC236}">
+                <a16:creationId xmlns:a16="http://schemas.microsoft.com/office/drawing/2014/main" id="{F6836372-7C36-53A5-7A74-F5DDFAED12B7}"/>
+              </a:ext>
+            </a:extLst>
+          </p:cNvPr>
+          <p:cNvPicPr>
+            <a:picLocks noChangeAspect="1"/>
+          </p:cNvPicPr>
+          <p:nvPr/>
+        </p:nvPicPr>
+        <p:blipFill>
+          <a:blip r:embed="rId2"/>
+          <a:stretch>
+            <a:fillRect/>
+          </a:stretch>
+        </p:blipFill>
+        <p:spPr>
+          <a:xfrm>
+            <a:off x="7944787" y="1918366"/>
+            <a:ext cx="4246355" cy="3317225"/>
+          </a:xfrm>
+          <a:prstGeom prst="rect">
+            <a:avLst/>
+          </a:prstGeom>
+        </p:spPr>
+      </p:pic>
+      <p:pic>
+        <p:nvPicPr>
+          <p:cNvPr id="3" name="Picture 2">
+            <a:extLst>
+              <a:ext uri="{FF2B5EF4-FFF2-40B4-BE49-F238E27FC236}">
+                <a16:creationId xmlns:a16="http://schemas.microsoft.com/office/drawing/2014/main" id="{61D29528-DD1E-79AB-6391-CAD70E30BAD7}"/>
+              </a:ext>
+            </a:extLst>
+          </p:cNvPr>
+          <p:cNvPicPr>
+            <a:picLocks noChangeAspect="1"/>
+          </p:cNvPicPr>
+          <p:nvPr/>
+        </p:nvPicPr>
+        <p:blipFill rotWithShape="1">
+          <a:blip r:embed="rId3"/>
+          <a:srcRect b="28588"/>
+          <a:stretch/>
+        </p:blipFill>
+        <p:spPr>
+          <a:xfrm>
+            <a:off x="2241584" y="1053420"/>
+            <a:ext cx="5411794" cy="4999908"/>
+          </a:xfrm>
+          <a:prstGeom prst="rect">
+            <a:avLst/>
+          </a:prstGeom>
+        </p:spPr>
+      </p:pic>
+      <p:pic>
+        <p:nvPicPr>
+          <p:cNvPr id="13" name="Picture 12">
+            <a:extLst>
+              <a:ext uri="{FF2B5EF4-FFF2-40B4-BE49-F238E27FC236}">
+                <a16:creationId xmlns:a16="http://schemas.microsoft.com/office/drawing/2014/main" id="{04854923-88FA-B708-8C1A-F2E8C0FF74F0}"/>
+              </a:ext>
+            </a:extLst>
+          </p:cNvPr>
+          <p:cNvPicPr>
+            <a:picLocks noChangeAspect="1"/>
+          </p:cNvPicPr>
+          <p:nvPr/>
+        </p:nvPicPr>
+        <p:blipFill rotWithShape="1">
+          <a:blip r:embed="rId3"/>
+          <a:srcRect l="10917" t="70960" r="47493"/>
+          <a:stretch/>
+        </p:blipFill>
+        <p:spPr>
+          <a:xfrm flipV="1">
+            <a:off x="8109" y="3568540"/>
+            <a:ext cx="2547330" cy="2301060"/>
+          </a:xfrm>
+          <a:prstGeom prst="rect">
+            <a:avLst/>
+          </a:prstGeom>
+        </p:spPr>
+      </p:pic>
+      <p:sp>
+        <p:nvSpPr>
+          <p:cNvPr id="4" name="Rectangle 3">
+            <a:extLst>
+              <a:ext uri="{FF2B5EF4-FFF2-40B4-BE49-F238E27FC236}">
+                <a16:creationId xmlns:a16="http://schemas.microsoft.com/office/drawing/2014/main" id="{E489CD65-A854-5E77-D5F6-9038FB903C3C}"/>
+              </a:ext>
+            </a:extLst>
+          </p:cNvPr>
+          <p:cNvSpPr/>
+          <p:nvPr/>
+        </p:nvSpPr>
+        <p:spPr>
+          <a:xfrm>
+            <a:off x="4734463" y="1066890"/>
+            <a:ext cx="2547329" cy="4986438"/>
+          </a:xfrm>
+          <a:prstGeom prst="rect">
+            <a:avLst/>
+          </a:prstGeom>
+          <a:solidFill>
+            <a:schemeClr val="bg1"/>
+          </a:solidFill>
+          <a:ln>
+            <a:noFill/>
+          </a:ln>
+        </p:spPr>
+        <p:style>
+          <a:lnRef idx="2">
+            <a:schemeClr val="accent1">
+              <a:shade val="15000"/>
+            </a:schemeClr>
+          </a:lnRef>
+          <a:fillRef idx="1">
+            <a:schemeClr val="accent1"/>
+          </a:fillRef>
+          <a:effectRef idx="0">
+            <a:schemeClr val="accent1"/>
+          </a:effectRef>
+          <a:fontRef idx="minor">
+            <a:schemeClr val="lt1"/>
+          </a:fontRef>
+        </p:style>
+        <p:txBody>
+          <a:bodyPr rtlCol="0" anchor="ctr"/>
+          <a:lstStyle/>
+          <a:p>
+            <a:pPr algn="ctr"/>
+            <a:endParaRPr lang="en-GB"/>
+          </a:p>
+        </p:txBody>
+      </p:sp>
+      <p:pic>
+        <p:nvPicPr>
+          <p:cNvPr id="10" name="Picture 9">
+            <a:extLst>
+              <a:ext uri="{FF2B5EF4-FFF2-40B4-BE49-F238E27FC236}">
+                <a16:creationId xmlns:a16="http://schemas.microsoft.com/office/drawing/2014/main" id="{0401B067-9AAE-B4DF-3058-8BBC9CBC1E8C}"/>
+              </a:ext>
+            </a:extLst>
+          </p:cNvPr>
+          <p:cNvPicPr>
+            <a:picLocks noChangeAspect="1"/>
+          </p:cNvPicPr>
+          <p:nvPr/>
+        </p:nvPicPr>
+        <p:blipFill rotWithShape="1">
+          <a:blip r:embed="rId3"/>
+          <a:srcRect l="56469" t="70960" r="3968"/>
+          <a:stretch/>
+        </p:blipFill>
+        <p:spPr>
+          <a:xfrm flipV="1">
+            <a:off x="70194" y="1066890"/>
+            <a:ext cx="2423160" cy="2301060"/>
+          </a:xfrm>
+          <a:prstGeom prst="rect">
+            <a:avLst/>
+          </a:prstGeom>
+        </p:spPr>
+      </p:pic>
+      <p:sp>
+        <p:nvSpPr>
+          <p:cNvPr id="2" name="Title 1">
+            <a:extLst>
+              <a:ext uri="{FF2B5EF4-FFF2-40B4-BE49-F238E27FC236}">
+                <a16:creationId xmlns:a16="http://schemas.microsoft.com/office/drawing/2014/main" id="{532501DB-802D-828C-CF13-9C32CEA065AA}"/>
+              </a:ext>
+            </a:extLst>
+          </p:cNvPr>
+          <p:cNvSpPr>
+            <a:spLocks noGrp="1"/>
+          </p:cNvSpPr>
+          <p:nvPr>
+            <p:ph type="title"/>
+          </p:nvPr>
+        </p:nvSpPr>
+        <p:spPr>
+          <a:xfrm>
+            <a:off x="0" y="1"/>
+            <a:ext cx="12192000" cy="714702"/>
+          </a:xfrm>
+        </p:spPr>
+        <p:txBody>
+          <a:bodyPr>
+            <a:normAutofit/>
+          </a:bodyPr>
+          <a:lstStyle/>
+          <a:p>
+            <a:pPr algn="ctr"/>
+            <a:r>
+              <a:rPr lang="en-GB" sz="2800" dirty="0">
+                <a:latin typeface="Aptos" panose="020B0004020202020204" pitchFamily="34" charset="0"/>
+              </a:rPr>
+              <a:t>Frontier bands of Zn porphene</a:t>
+            </a:r>
+          </a:p>
+        </p:txBody>
+      </p:sp>
+      <p:sp>
+        <p:nvSpPr>
+          <p:cNvPr id="6" name="TextBox 5">
+            <a:extLst>
+              <a:ext uri="{FF2B5EF4-FFF2-40B4-BE49-F238E27FC236}">
+                <a16:creationId xmlns:a16="http://schemas.microsoft.com/office/drawing/2014/main" id="{9920A2D3-A328-C74C-42F3-D88C44E020CC}"/>
+              </a:ext>
+            </a:extLst>
+          </p:cNvPr>
+          <p:cNvSpPr txBox="1"/>
+          <p:nvPr/>
+        </p:nvSpPr>
+        <p:spPr>
+          <a:xfrm>
+            <a:off x="0" y="6493330"/>
+            <a:ext cx="6096000" cy="369332"/>
+          </a:xfrm>
+          <a:prstGeom prst="rect">
+            <a:avLst/>
+          </a:prstGeom>
+          <a:noFill/>
+        </p:spPr>
+        <p:txBody>
+          <a:bodyPr wrap="square">
+            <a:spAutoFit/>
+          </a:bodyPr>
+          <a:lstStyle/>
+          <a:p>
+            <a:r>
+              <a:rPr lang="en-GB" i="1" dirty="0">
+                <a:latin typeface="Aptos" panose="020B0004020202020204" pitchFamily="34" charset="0"/>
+              </a:rPr>
+              <a:t>JACS</a:t>
+            </a:r>
+            <a:r>
+              <a:rPr lang="en-GB" dirty="0">
+                <a:latin typeface="Aptos" panose="020B0004020202020204" pitchFamily="34" charset="0"/>
+              </a:rPr>
+              <a:t> </a:t>
+            </a:r>
+            <a:r>
+              <a:rPr lang="en-GB" b="1" dirty="0">
+                <a:latin typeface="Aptos" panose="020B0004020202020204" pitchFamily="34" charset="0"/>
+              </a:rPr>
+              <a:t>2024</a:t>
+            </a:r>
+            <a:r>
+              <a:rPr lang="en-GB" dirty="0">
+                <a:latin typeface="Aptos" panose="020B0004020202020204" pitchFamily="34" charset="0"/>
+              </a:rPr>
+              <a:t>, </a:t>
+            </a:r>
+            <a:r>
+              <a:rPr lang="en-GB" i="1" dirty="0">
+                <a:latin typeface="Aptos" panose="020B0004020202020204" pitchFamily="34" charset="0"/>
+              </a:rPr>
+              <a:t>146,</a:t>
+            </a:r>
+            <a:r>
+              <a:rPr lang="en-GB" dirty="0">
+                <a:latin typeface="Aptos" panose="020B0004020202020204" pitchFamily="34" charset="0"/>
+              </a:rPr>
+              <a:t> 3992.</a:t>
+            </a:r>
+          </a:p>
+        </p:txBody>
+      </p:sp>
+    </p:spTree>
+    <p:extLst>
+      <p:ext uri="{BB962C8B-B14F-4D97-AF65-F5344CB8AC3E}">
+        <p14:creationId xmlns:p14="http://schemas.microsoft.com/office/powerpoint/2010/main" val="1499941626"/>
+      </p:ext>
+    </p:extLst>
+  </p:cSld>
+  <p:clrMapOvr>
+    <a:masterClrMapping/>
+  </p:clrMapOvr>
+</p:sld>
+</file>
+
+<file path=ppt/slides/slide18.xml><?xml version="1.0" encoding="utf-8"?>
+<p:sld xmlns:a="http://schemas.openxmlformats.org/drawingml/2006/main" xmlns:r="http://schemas.openxmlformats.org/officeDocument/2006/relationships" xmlns:p="http://schemas.openxmlformats.org/presentationml/2006/main">
+  <p:cSld>
+    <p:spTree>
+      <p:nvGrpSpPr>
+        <p:cNvPr id="1" name=""/>
+        <p:cNvGrpSpPr/>
+        <p:nvPr/>
+      </p:nvGrpSpPr>
+      <p:grpSpPr>
+        <a:xfrm>
+          <a:off x="0" y="0"/>
+          <a:ext cx="0" cy="0"/>
+          <a:chOff x="0" y="0"/>
+          <a:chExt cx="0" cy="0"/>
+        </a:xfrm>
+      </p:grpSpPr>
+      <p:pic>
+        <p:nvPicPr>
           <p:cNvPr id="9" name="Picture 8">
             <a:extLst>
               <a:ext uri="{FF2B5EF4-FFF2-40B4-BE49-F238E27FC236}">
@@ -7443,7 +7660,7 @@
 </p:sld>
 </file>
 
-<file path=ppt/slides/slide18.xml><?xml version="1.0" encoding="utf-8"?>
+<file path=ppt/slides/slide19.xml><?xml version="1.0" encoding="utf-8"?>
 <p:sld xmlns:a="http://schemas.openxmlformats.org/drawingml/2006/main" xmlns:r="http://schemas.openxmlformats.org/officeDocument/2006/relationships" xmlns:p="http://schemas.openxmlformats.org/presentationml/2006/main">
   <p:cSld>
     <p:spTree>
